--- a/vde-zugangsverwaltung/docs/VDE-Zugangsverwaltung-Onepager.pptx
+++ b/vde-zugangsverwaltung/docs/VDE-Zugangsverwaltung-Onepager.pptx
@@ -502,7 +502,7 @@
           <a:p>
             <a:r>
               <a:rPr lang="en-US" dirty="0"/>
-              <a:t>Onepager zum Konzept der VDE-Zugangsverwaltung. Kernaussage: Der Databricks-Job automatisiert die Entscheidung, wer welchen Regelwerkszugang braucht, nicht die Ausfuehrung im VDE-Portal. Soll aus SharePoint, Ist als Delta-Tabelle, Ergebnis ist eine priorisierte Aufgabenliste per Mail.</a:t>
+              <a:t>Onepager zum Konzept der VDE-Zugangsverwaltung. Kernaussage: Der Databricks-Job uebernimmt Entscheidung UND Ausfuehrung - er bedient die Normenbibliothek per Browser-Automatisierung. Soll aus SharePoint, Ist direkt aus dem Portal. Sicherheitsnetz ist die Notbremse.</a:t>
             </a:r>
             <a:endParaRPr lang="en-US" dirty="0"/>
           </a:p>
@@ -900,7 +900,7 @@
               <a:buNone/>
             </a:pPr>
             <a:r>
-              <a:rPr lang="en-US" sz="2600" b="1" dirty="0">
+              <a:rPr lang="en-US" sz="2400" b="1" dirty="0">
                 <a:solidFill>
                   <a:srgbClr val="21295C"/>
                 </a:solidFill>
@@ -908,9 +908,9 @@
                 <a:ea typeface="Cambria" pitchFamily="34" charset="-122"/>
                 <a:cs typeface="Cambria" pitchFamily="34" charset="-120"/>
               </a:rPr>
-              <a:t>VDE-Regelwerkszugänge automatisiert verwalten</a:t>
-            </a:r>
-            <a:endParaRPr lang="en-US" sz="2600" dirty="0"/>
+              <a:t>VDE-Regelwerkszugänge vollautomatisch verwalten</a:t>
+            </a:r>
+            <a:endParaRPr lang="en-US" sz="2400" dirty="0"/>
           </a:p>
         </p:txBody>
       </p:sp>
@@ -947,7 +947,7 @@
                 <a:ea typeface="Calibri" pitchFamily="34" charset="-122"/>
                 <a:cs typeface="Calibri" pitchFamily="34" charset="-120"/>
               </a:rPr>
-              <a:t>Databricks-Job: gleicht die SharePoint-Liste (Soll) mit dem geführten Ist-Bestand ab und liefert dem Zugangsverantwortlichen eine priorisierte Aufgabenliste.</a:t>
+              <a:t>Der Databricks-Job liest den Soll-Zustand aus SharePoint, den Ist-Zustand aus der Normenbibliothek – und legt Zugänge dort selbst an, entzieht und verlängert sie.</a:t>
             </a:r>
             <a:endParaRPr lang="en-US" sz="1300" dirty="0"/>
           </a:p>
@@ -1208,7 +1208,7 @@
                 <a:ea typeface="Calibri" pitchFamily="34" charset="-122"/>
                 <a:cs typeface="Calibri" pitchFamily="34" charset="-120"/>
               </a:rPr>
-              <a:t>Soll-Zustand: welcher Mitarbeiter braucht welches Regelwerk, Austrittsdatum, Gültigkeit.</a:t>
+              <a:t>Soll: welcher Mitarbeiter braucht welches Regelwerk, Austritt, Gültigkeit.</a:t>
             </a:r>
             <a:endParaRPr lang="en-US" sz="950" dirty="0"/>
           </a:p>
@@ -1380,7 +1380,7 @@
                 <a:ea typeface="Calibri" pitchFamily="34" charset="-122"/>
                 <a:cs typeface="Calibri" pitchFamily="34" charset="-120"/>
               </a:rPr>
-              <a:t>Liest über Microsoft Graph (nur lesend), vergleicht mit dem Ist-Bestand, prüft Fristen.</a:t>
+              <a:t>Vergleicht Soll und Ist, prüft Fristen, bestimmt die nötigen Änderungen.</a:t>
             </a:r>
             <a:endParaRPr lang="en-US" sz="950" dirty="0"/>
           </a:p>
@@ -1510,7 +1510,7 @@
                 <a:ea typeface="Cambria" pitchFamily="34" charset="-122"/>
                 <a:cs typeface="Cambria" pitchFamily="34" charset="-120"/>
               </a:rPr>
-              <a:t>Aufgabenliste</a:t>
+              <a:t>Normenbibliothek</a:t>
             </a:r>
             <a:endParaRPr lang="en-US" sz="1300" dirty="0"/>
           </a:p>
@@ -1552,7 +1552,7 @@
                 <a:ea typeface="Calibri" pitchFamily="34" charset="-122"/>
                 <a:cs typeface="Calibri" pitchFamily="34" charset="-120"/>
               </a:rPr>
-              <a:t>Mail mit priorisierten Maßnahmen, CSV im Anhang, Protokoll in Delta.</a:t>
+              <a:t>Der Job bedient die Oberfläche selbst: anlegen, entziehen, verlängern.</a:t>
             </a:r>
             <a:endParaRPr lang="en-US" sz="950" dirty="0"/>
           </a:p>
@@ -1682,7 +1682,7 @@
                 <a:ea typeface="Cambria" pitchFamily="34" charset="-122"/>
                 <a:cs typeface="Cambria" pitchFamily="34" charset="-120"/>
               </a:rPr>
-              <a:t>VDE-Portal</a:t>
+              <a:t>Nachweis</a:t>
             </a:r>
             <a:endParaRPr lang="en-US" sz="1300" dirty="0"/>
           </a:p>
@@ -1724,7 +1724,7 @@
                 <a:ea typeface="Calibri" pitchFamily="34" charset="-122"/>
                 <a:cs typeface="Calibri" pitchFamily="34" charset="-120"/>
               </a:rPr>
-              <a:t>Zugänge manuell anlegen oder entziehen – der Job hat die Arbeit vorsortiert.</a:t>
+              <a:t>Jede Aktion wird nachgelesen, protokolliert und per Mail berichtet.</a:t>
             </a:r>
             <a:endParaRPr lang="en-US" sz="950" dirty="0"/>
           </a:p>
@@ -1822,13 +1822,13 @@
             </a:avLst>
           </a:prstGeom>
           <a:solidFill>
-            <a:srgbClr val="FFFFFF"/>
+            <a:srgbClr val="FDF3F3"/>
           </a:solidFill>
           <a:ln w="12700">
             <a:solidFill>
-              <a:srgbClr val="1C7293"/>
+              <a:srgbClr val="A63D32"/>
             </a:solidFill>
-            <a:prstDash val="dash"/>
+            <a:prstDash val="solid"/>
           </a:ln>
         </p:spPr>
       </p:sp>
@@ -1840,10 +1840,154 @@
         </p:nvSpPr>
         <p:spPr>
           <a:xfrm>
-            <a:off x="3520440" y="2798064"/>
-            <a:ext cx="237744" cy="146304"/>
-          </a:xfrm>
-          <a:prstGeom prst="leftArrow">
+            <a:off x="3538728" y="2788920"/>
+            <a:ext cx="164592" cy="164592"/>
+          </a:xfrm>
+          <a:prstGeom prst="ellipse">
+            <a:avLst/>
+          </a:prstGeom>
+          <a:solidFill>
+            <a:srgbClr val="A63D32"/>
+          </a:solidFill>
+          <a:ln w="12700">
+            <a:solidFill>
+              <a:srgbClr val="A63D32"/>
+            </a:solidFill>
+            <a:prstDash val="solid"/>
+          </a:ln>
+        </p:spPr>
+      </p:sp>
+      <p:sp>
+        <p:nvSpPr>
+          <p:cNvPr id="31" name="Text 29"/>
+          <p:cNvSpPr txBox="1"/>
+          <p:nvPr/>
+        </p:nvSpPr>
+        <p:spPr>
+          <a:xfrm>
+            <a:off x="3831336" y="2670048"/>
+            <a:ext cx="7699248" cy="402336"/>
+          </a:xfrm>
+          <a:prstGeom prst="rect">
+            <a:avLst/>
+          </a:prstGeom>
+          <a:noFill/>
+          <a:ln/>
+        </p:spPr>
+        <p:txBody>
+          <a:bodyPr wrap="square" lIns="0" tIns="0" rIns="0" bIns="0" rtlCol="0" anchor="ctr"/>
+          <a:lstStyle/>
+          <a:p>
+            <a:pPr indent="0" marL="0">
+              <a:buNone/>
+            </a:pPr>
+            <a:r>
+              <a:rPr lang="en-US" sz="950" b="1" dirty="0">
+                <a:solidFill>
+                  <a:srgbClr val="A63D32"/>
+                </a:solidFill>
+                <a:latin typeface="Calibri" pitchFamily="34" charset="0"/>
+                <a:ea typeface="Calibri" pitchFamily="34" charset="-122"/>
+                <a:cs typeface="Calibri" pitchFamily="34" charset="-120"/>
+              </a:rPr>
+              <a:t>Notbremse:  </a:t>
+            </a:r>
+            <a:pPr indent="0" marL="0">
+              <a:buNone/>
+            </a:pPr>
+            <a:r>
+              <a:rPr lang="en-US" sz="950" dirty="0">
+                <a:solidFill>
+                  <a:srgbClr val="44515E"/>
+                </a:solidFill>
+                <a:latin typeface="Calibri" pitchFamily="34" charset="0"/>
+                <a:ea typeface="Calibri" pitchFamily="34" charset="-122"/>
+                <a:cs typeface="Calibri" pitchFamily="34" charset="-120"/>
+              </a:rPr>
+              <a:t>Bei mehr als 10 Entzügen, 40 Änderungen oder 30 % des Bestands stoppt der Lauf, bevor er irgendetwas ändert – eine kaputte Liste darf niemandem den Zugang nehmen.</a:t>
+            </a:r>
+            <a:endParaRPr lang="en-US" sz="950" dirty="0"/>
+          </a:p>
+        </p:txBody>
+      </p:sp>
+      <p:sp>
+        <p:nvSpPr>
+          <p:cNvPr id="32" name="Text 30"/>
+          <p:cNvSpPr txBox="1"/>
+          <p:nvPr/>
+        </p:nvSpPr>
+        <p:spPr>
+          <a:xfrm>
+            <a:off x="502920" y="3218688"/>
+            <a:ext cx="5486400" cy="274320"/>
+          </a:xfrm>
+          <a:prstGeom prst="rect">
+            <a:avLst/>
+          </a:prstGeom>
+          <a:noFill/>
+          <a:ln/>
+        </p:spPr>
+        <p:txBody>
+          <a:bodyPr wrap="square" lIns="0" tIns="0" rIns="0" bIns="0" rtlCol="0" anchor="ctr"/>
+          <a:lstStyle/>
+          <a:p>
+            <a:pPr indent="0" marL="0">
+              <a:buNone/>
+            </a:pPr>
+            <a:r>
+              <a:rPr lang="en-US" sz="1600" b="1" dirty="0">
+                <a:solidFill>
+                  <a:srgbClr val="21295C"/>
+                </a:solidFill>
+                <a:latin typeface="Cambria" pitchFamily="34" charset="0"/>
+                <a:ea typeface="Cambria" pitchFamily="34" charset="-122"/>
+                <a:cs typeface="Cambria" pitchFamily="34" charset="-120"/>
+              </a:rPr>
+              <a:t>Was der Job erkennt</a:t>
+            </a:r>
+            <a:endParaRPr lang="en-US" sz="1600" dirty="0"/>
+          </a:p>
+        </p:txBody>
+      </p:sp>
+      <p:sp>
+        <p:nvSpPr>
+          <p:cNvPr id="33" name="Shape 31"/>
+          <p:cNvSpPr/>
+          <p:nvPr/>
+        </p:nvSpPr>
+        <p:spPr>
+          <a:xfrm>
+            <a:off x="502920" y="3547872"/>
+            <a:ext cx="2487168" cy="1152144"/>
+          </a:xfrm>
+          <a:prstGeom prst="roundRect">
+            <a:avLst>
+              <a:gd name="adj" fmla="val 4762"/>
+            </a:avLst>
+          </a:prstGeom>
+          <a:solidFill>
+            <a:srgbClr val="FFFFFF"/>
+          </a:solidFill>
+          <a:ln w="12700">
+            <a:solidFill>
+              <a:srgbClr val="D5E0E8"/>
+            </a:solidFill>
+            <a:prstDash val="solid"/>
+          </a:ln>
+        </p:spPr>
+      </p:sp>
+      <p:sp>
+        <p:nvSpPr>
+          <p:cNvPr id="34" name="Shape 32"/>
+          <p:cNvSpPr/>
+          <p:nvPr/>
+        </p:nvSpPr>
+        <p:spPr>
+          <a:xfrm>
+            <a:off x="676656" y="3767328"/>
+            <a:ext cx="137160" cy="137160"/>
+          </a:xfrm>
+          <a:prstGeom prst="ellipse">
             <a:avLst/>
           </a:prstGeom>
           <a:solidFill>
@@ -1859,14 +2003,14 @@
       </p:sp>
       <p:sp>
         <p:nvSpPr>
-          <p:cNvPr id="31" name="Text 29"/>
+          <p:cNvPr id="35" name="Text 33"/>
           <p:cNvSpPr txBox="1"/>
           <p:nvPr/>
         </p:nvSpPr>
         <p:spPr>
           <a:xfrm>
-            <a:off x="3831336" y="2670048"/>
-            <a:ext cx="7699248" cy="402336"/>
+            <a:off x="905256" y="3694176"/>
+            <a:ext cx="1938528" cy="274320"/>
           </a:xfrm>
           <a:prstGeom prst="rect">
             <a:avLst/>
@@ -1882,7 +2026,7 @@
               <a:buNone/>
             </a:pPr>
             <a:r>
-              <a:rPr lang="en-US" sz="950" b="1" dirty="0">
+              <a:rPr lang="en-US" sz="1200" b="1" spc="100" kern="0" dirty="0">
                 <a:solidFill>
                   <a:srgbClr val="1C7293"/>
                 </a:solidFill>
@@ -1890,13 +2034,41 @@
                 <a:ea typeface="Calibri" pitchFamily="34" charset="-122"/>
                 <a:cs typeface="Calibri" pitchFamily="34" charset="-120"/>
               </a:rPr>
-              <a:t>Ist-Bestand als Delta-Tabelle:  </a:t>
-            </a:r>
+              <a:t>ANLEGEN</a:t>
+            </a:r>
+            <a:endParaRPr lang="en-US" sz="1200" dirty="0"/>
+          </a:p>
+        </p:txBody>
+      </p:sp>
+      <p:sp>
+        <p:nvSpPr>
+          <p:cNvPr id="36" name="Text 34"/>
+          <p:cNvSpPr txBox="1"/>
+          <p:nvPr/>
+        </p:nvSpPr>
+        <p:spPr>
+          <a:xfrm>
+            <a:off x="676656" y="4041648"/>
+            <a:ext cx="2139696" cy="621792"/>
+          </a:xfrm>
+          <a:prstGeom prst="rect">
+            <a:avLst/>
+          </a:prstGeom>
+          <a:noFill/>
+          <a:ln/>
+        </p:spPr>
+        <p:txBody>
+          <a:bodyPr wrap="square" lIns="0" tIns="0" rIns="0" bIns="0" rtlCol="0" anchor="t"/>
+          <a:lstStyle/>
+          <a:p>
             <a:pPr indent="0" marL="0">
-              <a:buNone/>
-            </a:pPr>
-            <a:r>
-              <a:rPr lang="en-US" sz="950" dirty="0">
+              <a:lnSpc>
+                <a:spcPct val="100000"/>
+              </a:lnSpc>
+              <a:buNone/>
+            </a:pPr>
+            <a:r>
+              <a:rPr lang="en-US" sz="1000" dirty="0">
                 <a:solidFill>
                   <a:srgbClr val="44515E"/>
                 </a:solidFill>
@@ -1904,60 +2076,21 @@
                 <a:ea typeface="Calibri" pitchFamily="34" charset="-122"/>
                 <a:cs typeface="Calibri" pitchFamily="34" charset="-120"/>
               </a:rPr>
-              <a:t>Das VDE-Portal kennt keine Abfrage – erledigte Maßnahmen werden zurückgemeldet, damit der nächste Lauf sie nicht erneut vorschlägt.</a:t>
-            </a:r>
-            <a:endParaRPr lang="en-US" sz="950" dirty="0"/>
-          </a:p>
-        </p:txBody>
-      </p:sp>
-      <p:sp>
-        <p:nvSpPr>
-          <p:cNvPr id="32" name="Text 30"/>
-          <p:cNvSpPr txBox="1"/>
-          <p:nvPr/>
-        </p:nvSpPr>
-        <p:spPr>
-          <a:xfrm>
-            <a:off x="502920" y="3218688"/>
-            <a:ext cx="5486400" cy="274320"/>
-          </a:xfrm>
-          <a:prstGeom prst="rect">
-            <a:avLst/>
-          </a:prstGeom>
-          <a:noFill/>
-          <a:ln/>
-        </p:spPr>
-        <p:txBody>
-          <a:bodyPr wrap="square" lIns="0" tIns="0" rIns="0" bIns="0" rtlCol="0" anchor="ctr"/>
-          <a:lstStyle/>
-          <a:p>
-            <a:pPr indent="0" marL="0">
-              <a:buNone/>
-            </a:pPr>
-            <a:r>
-              <a:rPr lang="en-US" sz="1600" b="1" dirty="0">
-                <a:solidFill>
-                  <a:srgbClr val="21295C"/>
-                </a:solidFill>
-                <a:latin typeface="Cambria" pitchFamily="34" charset="0"/>
-                <a:ea typeface="Cambria" pitchFamily="34" charset="-122"/>
-                <a:cs typeface="Cambria" pitchFamily="34" charset="-120"/>
-              </a:rPr>
-              <a:t>Was der Job erkennt</a:t>
-            </a:r>
-            <a:endParaRPr lang="en-US" sz="1600" dirty="0"/>
-          </a:p>
-        </p:txBody>
-      </p:sp>
-      <p:sp>
-        <p:nvSpPr>
-          <p:cNvPr id="33" name="Shape 31"/>
+              <a:t>Mitarbeiter steht mit einem Regelwerk in der Liste, hat aber keinen Zugang.</a:t>
+            </a:r>
+            <a:endParaRPr lang="en-US" sz="1000" dirty="0"/>
+          </a:p>
+        </p:txBody>
+      </p:sp>
+      <p:sp>
+        <p:nvSpPr>
+          <p:cNvPr id="37" name="Shape 35"/>
           <p:cNvSpPr/>
           <p:nvPr/>
         </p:nvSpPr>
         <p:spPr>
           <a:xfrm>
-            <a:off x="502920" y="3547872"/>
+            <a:off x="3392424" y="3547872"/>
             <a:ext cx="2487168" cy="1152144"/>
           </a:xfrm>
           <a:prstGeom prst="roundRect">
@@ -1978,14 +2111,425 @@
       </p:sp>
       <p:sp>
         <p:nvSpPr>
-          <p:cNvPr id="34" name="Shape 32"/>
+          <p:cNvPr id="38" name="Shape 36"/>
           <p:cNvSpPr/>
           <p:nvPr/>
         </p:nvSpPr>
         <p:spPr>
           <a:xfrm>
-            <a:off x="676656" y="3767328"/>
+            <a:off x="3566160" y="3767328"/>
             <a:ext cx="137160" cy="137160"/>
+          </a:xfrm>
+          <a:prstGeom prst="ellipse">
+            <a:avLst/>
+          </a:prstGeom>
+          <a:solidFill>
+            <a:srgbClr val="A63D32"/>
+          </a:solidFill>
+          <a:ln w="12700">
+            <a:solidFill>
+              <a:srgbClr val="A63D32"/>
+            </a:solidFill>
+            <a:prstDash val="solid"/>
+          </a:ln>
+        </p:spPr>
+      </p:sp>
+      <p:sp>
+        <p:nvSpPr>
+          <p:cNvPr id="39" name="Text 37"/>
+          <p:cNvSpPr txBox="1"/>
+          <p:nvPr/>
+        </p:nvSpPr>
+        <p:spPr>
+          <a:xfrm>
+            <a:off x="3794760" y="3694176"/>
+            <a:ext cx="1938528" cy="274320"/>
+          </a:xfrm>
+          <a:prstGeom prst="rect">
+            <a:avLst/>
+          </a:prstGeom>
+          <a:noFill/>
+          <a:ln/>
+        </p:spPr>
+        <p:txBody>
+          <a:bodyPr wrap="square" lIns="0" tIns="0" rIns="0" bIns="0" rtlCol="0" anchor="ctr"/>
+          <a:lstStyle/>
+          <a:p>
+            <a:pPr indent="0" marL="0">
+              <a:buNone/>
+            </a:pPr>
+            <a:r>
+              <a:rPr lang="en-US" sz="1200" b="1" spc="100" kern="0" dirty="0">
+                <a:solidFill>
+                  <a:srgbClr val="A63D32"/>
+                </a:solidFill>
+                <a:latin typeface="Calibri" pitchFamily="34" charset="0"/>
+                <a:ea typeface="Calibri" pitchFamily="34" charset="-122"/>
+                <a:cs typeface="Calibri" pitchFamily="34" charset="-120"/>
+              </a:rPr>
+              <a:t>ENTZIEHEN</a:t>
+            </a:r>
+            <a:endParaRPr lang="en-US" sz="1200" dirty="0"/>
+          </a:p>
+        </p:txBody>
+      </p:sp>
+      <p:sp>
+        <p:nvSpPr>
+          <p:cNvPr id="40" name="Text 38"/>
+          <p:cNvSpPr txBox="1"/>
+          <p:nvPr/>
+        </p:nvSpPr>
+        <p:spPr>
+          <a:xfrm>
+            <a:off x="3566160" y="4041648"/>
+            <a:ext cx="2139696" cy="621792"/>
+          </a:xfrm>
+          <a:prstGeom prst="rect">
+            <a:avLst/>
+          </a:prstGeom>
+          <a:noFill/>
+          <a:ln/>
+        </p:spPr>
+        <p:txBody>
+          <a:bodyPr wrap="square" lIns="0" tIns="0" rIns="0" bIns="0" rtlCol="0" anchor="t"/>
+          <a:lstStyle/>
+          <a:p>
+            <a:pPr indent="0" marL="0">
+              <a:lnSpc>
+                <a:spcPct val="100000"/>
+              </a:lnSpc>
+              <a:buNone/>
+            </a:pPr>
+            <a:r>
+              <a:rPr lang="en-US" sz="1000" dirty="0">
+                <a:solidFill>
+                  <a:srgbClr val="44515E"/>
+                </a:solidFill>
+                <a:latin typeface="Calibri" pitchFamily="34" charset="0"/>
+                <a:ea typeface="Calibri" pitchFamily="34" charset="-122"/>
+                <a:cs typeface="Calibri" pitchFamily="34" charset="-120"/>
+              </a:rPr>
+              <a:t>Ausgeschieden oder inaktiv, Austritt in den nächsten 30 Tagen, Bedarf entfallen.</a:t>
+            </a:r>
+            <a:endParaRPr lang="en-US" sz="1000" dirty="0"/>
+          </a:p>
+        </p:txBody>
+      </p:sp>
+      <p:sp>
+        <p:nvSpPr>
+          <p:cNvPr id="41" name="Shape 39"/>
+          <p:cNvSpPr/>
+          <p:nvPr/>
+        </p:nvSpPr>
+        <p:spPr>
+          <a:xfrm>
+            <a:off x="6281928" y="3547872"/>
+            <a:ext cx="2487168" cy="1152144"/>
+          </a:xfrm>
+          <a:prstGeom prst="roundRect">
+            <a:avLst>
+              <a:gd name="adj" fmla="val 4762"/>
+            </a:avLst>
+          </a:prstGeom>
+          <a:solidFill>
+            <a:srgbClr val="FFFFFF"/>
+          </a:solidFill>
+          <a:ln w="12700">
+            <a:solidFill>
+              <a:srgbClr val="D5E0E8"/>
+            </a:solidFill>
+            <a:prstDash val="solid"/>
+          </a:ln>
+        </p:spPr>
+      </p:sp>
+      <p:sp>
+        <p:nvSpPr>
+          <p:cNvPr id="42" name="Shape 40"/>
+          <p:cNvSpPr/>
+          <p:nvPr/>
+        </p:nvSpPr>
+        <p:spPr>
+          <a:xfrm>
+            <a:off x="6455664" y="3767328"/>
+            <a:ext cx="137160" cy="137160"/>
+          </a:xfrm>
+          <a:prstGeom prst="ellipse">
+            <a:avLst/>
+          </a:prstGeom>
+          <a:solidFill>
+            <a:srgbClr val="9C6F16"/>
+          </a:solidFill>
+          <a:ln w="12700">
+            <a:solidFill>
+              <a:srgbClr val="9C6F16"/>
+            </a:solidFill>
+            <a:prstDash val="solid"/>
+          </a:ln>
+        </p:spPr>
+      </p:sp>
+      <p:sp>
+        <p:nvSpPr>
+          <p:cNvPr id="43" name="Text 41"/>
+          <p:cNvSpPr txBox="1"/>
+          <p:nvPr/>
+        </p:nvSpPr>
+        <p:spPr>
+          <a:xfrm>
+            <a:off x="6684264" y="3694176"/>
+            <a:ext cx="1938528" cy="274320"/>
+          </a:xfrm>
+          <a:prstGeom prst="rect">
+            <a:avLst/>
+          </a:prstGeom>
+          <a:noFill/>
+          <a:ln/>
+        </p:spPr>
+        <p:txBody>
+          <a:bodyPr wrap="square" lIns="0" tIns="0" rIns="0" bIns="0" rtlCol="0" anchor="ctr"/>
+          <a:lstStyle/>
+          <a:p>
+            <a:pPr indent="0" marL="0">
+              <a:buNone/>
+            </a:pPr>
+            <a:r>
+              <a:rPr lang="en-US" sz="1200" b="1" spc="100" kern="0" dirty="0">
+                <a:solidFill>
+                  <a:srgbClr val="9C6F16"/>
+                </a:solidFill>
+                <a:latin typeface="Calibri" pitchFamily="34" charset="0"/>
+                <a:ea typeface="Calibri" pitchFamily="34" charset="-122"/>
+                <a:cs typeface="Calibri" pitchFamily="34" charset="-120"/>
+              </a:rPr>
+              <a:t>VERLÄNGERN</a:t>
+            </a:r>
+            <a:endParaRPr lang="en-US" sz="1200" dirty="0"/>
+          </a:p>
+        </p:txBody>
+      </p:sp>
+      <p:sp>
+        <p:nvSpPr>
+          <p:cNvPr id="44" name="Text 42"/>
+          <p:cNvSpPr txBox="1"/>
+          <p:nvPr/>
+        </p:nvSpPr>
+        <p:spPr>
+          <a:xfrm>
+            <a:off x="6455664" y="4041648"/>
+            <a:ext cx="2139696" cy="621792"/>
+          </a:xfrm>
+          <a:prstGeom prst="rect">
+            <a:avLst/>
+          </a:prstGeom>
+          <a:noFill/>
+          <a:ln/>
+        </p:spPr>
+        <p:txBody>
+          <a:bodyPr wrap="square" lIns="0" tIns="0" rIns="0" bIns="0" rtlCol="0" anchor="t"/>
+          <a:lstStyle/>
+          <a:p>
+            <a:pPr indent="0" marL="0">
+              <a:lnSpc>
+                <a:spcPct val="100000"/>
+              </a:lnSpc>
+              <a:buNone/>
+            </a:pPr>
+            <a:r>
+              <a:rPr lang="en-US" sz="1000" dirty="0">
+                <a:solidFill>
+                  <a:srgbClr val="44515E"/>
+                </a:solidFill>
+                <a:latin typeface="Calibri" pitchFamily="34" charset="0"/>
+                <a:ea typeface="Calibri" pitchFamily="34" charset="-122"/>
+                <a:cs typeface="Calibri" pitchFamily="34" charset="-120"/>
+              </a:rPr>
+              <a:t>Gültigkeit ist abgelaufen oder läuft im Vorlauffenster ab.</a:t>
+            </a:r>
+            <a:endParaRPr lang="en-US" sz="1000" dirty="0"/>
+          </a:p>
+        </p:txBody>
+      </p:sp>
+      <p:sp>
+        <p:nvSpPr>
+          <p:cNvPr id="45" name="Shape 43"/>
+          <p:cNvSpPr/>
+          <p:nvPr/>
+        </p:nvSpPr>
+        <p:spPr>
+          <a:xfrm>
+            <a:off x="9171432" y="3547872"/>
+            <a:ext cx="2487168" cy="1152144"/>
+          </a:xfrm>
+          <a:prstGeom prst="roundRect">
+            <a:avLst>
+              <a:gd name="adj" fmla="val 4762"/>
+            </a:avLst>
+          </a:prstGeom>
+          <a:solidFill>
+            <a:srgbClr val="FFFFFF"/>
+          </a:solidFill>
+          <a:ln w="12700">
+            <a:solidFill>
+              <a:srgbClr val="D5E0E8"/>
+            </a:solidFill>
+            <a:prstDash val="solid"/>
+          </a:ln>
+        </p:spPr>
+      </p:sp>
+      <p:sp>
+        <p:nvSpPr>
+          <p:cNvPr id="46" name="Shape 44"/>
+          <p:cNvSpPr/>
+          <p:nvPr/>
+        </p:nvSpPr>
+        <p:spPr>
+          <a:xfrm>
+            <a:off x="9345168" y="3767328"/>
+            <a:ext cx="137160" cy="137160"/>
+          </a:xfrm>
+          <a:prstGeom prst="ellipse">
+            <a:avLst/>
+          </a:prstGeom>
+          <a:solidFill>
+            <a:srgbClr val="6B7A8C"/>
+          </a:solidFill>
+          <a:ln w="12700">
+            <a:solidFill>
+              <a:srgbClr val="6B7A8C"/>
+            </a:solidFill>
+            <a:prstDash val="solid"/>
+          </a:ln>
+        </p:spPr>
+      </p:sp>
+      <p:sp>
+        <p:nvSpPr>
+          <p:cNvPr id="47" name="Text 45"/>
+          <p:cNvSpPr txBox="1"/>
+          <p:nvPr/>
+        </p:nvSpPr>
+        <p:spPr>
+          <a:xfrm>
+            <a:off x="9573768" y="3694176"/>
+            <a:ext cx="1938528" cy="274320"/>
+          </a:xfrm>
+          <a:prstGeom prst="rect">
+            <a:avLst/>
+          </a:prstGeom>
+          <a:noFill/>
+          <a:ln/>
+        </p:spPr>
+        <p:txBody>
+          <a:bodyPr wrap="square" lIns="0" tIns="0" rIns="0" bIns="0" rtlCol="0" anchor="ctr"/>
+          <a:lstStyle/>
+          <a:p>
+            <a:pPr indent="0" marL="0">
+              <a:buNone/>
+            </a:pPr>
+            <a:r>
+              <a:rPr lang="en-US" sz="1200" b="1" spc="100" kern="0" dirty="0">
+                <a:solidFill>
+                  <a:srgbClr val="6B7A8C"/>
+                </a:solidFill>
+                <a:latin typeface="Calibri" pitchFamily="34" charset="0"/>
+                <a:ea typeface="Calibri" pitchFamily="34" charset="-122"/>
+                <a:cs typeface="Calibri" pitchFamily="34" charset="-120"/>
+              </a:rPr>
+              <a:t>PRÜFEN</a:t>
+            </a:r>
+            <a:endParaRPr lang="en-US" sz="1200" dirty="0"/>
+          </a:p>
+        </p:txBody>
+      </p:sp>
+      <p:sp>
+        <p:nvSpPr>
+          <p:cNvPr id="48" name="Text 46"/>
+          <p:cNvSpPr txBox="1"/>
+          <p:nvPr/>
+        </p:nvSpPr>
+        <p:spPr>
+          <a:xfrm>
+            <a:off x="9345168" y="4041648"/>
+            <a:ext cx="2139696" cy="621792"/>
+          </a:xfrm>
+          <a:prstGeom prst="rect">
+            <a:avLst/>
+          </a:prstGeom>
+          <a:noFill/>
+          <a:ln/>
+        </p:spPr>
+        <p:txBody>
+          <a:bodyPr wrap="square" lIns="0" tIns="0" rIns="0" bIns="0" rtlCol="0" anchor="t"/>
+          <a:lstStyle/>
+          <a:p>
+            <a:pPr indent="0" marL="0">
+              <a:lnSpc>
+                <a:spcPct val="100000"/>
+              </a:lnSpc>
+              <a:buNone/>
+            </a:pPr>
+            <a:r>
+              <a:rPr lang="en-US" sz="1000" dirty="0">
+                <a:solidFill>
+                  <a:srgbClr val="44515E"/>
+                </a:solidFill>
+                <a:latin typeface="Calibri" pitchFamily="34" charset="0"/>
+                <a:ea typeface="Calibri" pitchFamily="34" charset="-122"/>
+                <a:cs typeface="Calibri" pitchFamily="34" charset="-120"/>
+              </a:rPr>
+              <a:t>Zugang ohne Stammdatensatz. Unklare Datenlage wird gemeldet, nie still entzogen.</a:t>
+            </a:r>
+            <a:endParaRPr lang="en-US" sz="1000" dirty="0"/>
+          </a:p>
+        </p:txBody>
+      </p:sp>
+      <p:sp>
+        <p:nvSpPr>
+          <p:cNvPr id="49" name="Text 47"/>
+          <p:cNvSpPr txBox="1"/>
+          <p:nvPr/>
+        </p:nvSpPr>
+        <p:spPr>
+          <a:xfrm>
+            <a:off x="502920" y="4901184"/>
+            <a:ext cx="4572000" cy="274320"/>
+          </a:xfrm>
+          <a:prstGeom prst="rect">
+            <a:avLst/>
+          </a:prstGeom>
+          <a:noFill/>
+          <a:ln/>
+        </p:spPr>
+        <p:txBody>
+          <a:bodyPr wrap="square" lIns="0" tIns="0" rIns="0" bIns="0" rtlCol="0" anchor="ctr"/>
+          <a:lstStyle/>
+          <a:p>
+            <a:pPr indent="0" marL="0">
+              <a:buNone/>
+            </a:pPr>
+            <a:r>
+              <a:rPr lang="en-US" sz="1600" b="1" dirty="0">
+                <a:solidFill>
+                  <a:srgbClr val="21295C"/>
+                </a:solidFill>
+                <a:latin typeface="Cambria" pitchFamily="34" charset="0"/>
+                <a:ea typeface="Cambria" pitchFamily="34" charset="-122"/>
+                <a:cs typeface="Cambria" pitchFamily="34" charset="-120"/>
+              </a:rPr>
+              <a:t>Konstruktionsprinzipien</a:t>
+            </a:r>
+            <a:endParaRPr lang="en-US" sz="1600" dirty="0"/>
+          </a:p>
+        </p:txBody>
+      </p:sp>
+      <p:sp>
+        <p:nvSpPr>
+          <p:cNvPr id="50" name="Shape 48"/>
+          <p:cNvSpPr/>
+          <p:nvPr/>
+        </p:nvSpPr>
+        <p:spPr>
+          <a:xfrm>
+            <a:off x="521208" y="5326380"/>
+            <a:ext cx="100584" cy="100584"/>
           </a:xfrm>
           <a:prstGeom prst="ellipse">
             <a:avLst/>
@@ -2003,14 +2547,14 @@
       </p:sp>
       <p:sp>
         <p:nvSpPr>
-          <p:cNvPr id="35" name="Text 33"/>
+          <p:cNvPr id="51" name="Text 49"/>
           <p:cNvSpPr txBox="1"/>
           <p:nvPr/>
         </p:nvSpPr>
         <p:spPr>
           <a:xfrm>
-            <a:off x="905256" y="3694176"/>
-            <a:ext cx="1938528" cy="274320"/>
+            <a:off x="740664" y="5248656"/>
+            <a:ext cx="6720840" cy="256032"/>
           </a:xfrm>
           <a:prstGeom prst="rect">
             <a:avLst/>
@@ -2026,49 +2570,21 @@
               <a:buNone/>
             </a:pPr>
             <a:r>
-              <a:rPr lang="en-US" sz="1200" b="1" spc="100" kern="0" dirty="0">
-                <a:solidFill>
-                  <a:srgbClr val="1C7293"/>
+              <a:rPr lang="en-US" sz="1050" b="1" dirty="0">
+                <a:solidFill>
+                  <a:srgbClr val="21295C"/>
                 </a:solidFill>
                 <a:latin typeface="Calibri" pitchFamily="34" charset="0"/>
                 <a:ea typeface="Calibri" pitchFamily="34" charset="-122"/>
                 <a:cs typeface="Calibri" pitchFamily="34" charset="-120"/>
               </a:rPr>
-              <a:t>ANLEGEN</a:t>
-            </a:r>
-            <a:endParaRPr lang="en-US" sz="1200" dirty="0"/>
-          </a:p>
-        </p:txBody>
-      </p:sp>
-      <p:sp>
-        <p:nvSpPr>
-          <p:cNvPr id="36" name="Text 34"/>
-          <p:cNvSpPr txBox="1"/>
-          <p:nvPr/>
-        </p:nvSpPr>
-        <p:spPr>
-          <a:xfrm>
-            <a:off x="676656" y="4041648"/>
-            <a:ext cx="2139696" cy="621792"/>
-          </a:xfrm>
-          <a:prstGeom prst="rect">
-            <a:avLst/>
-          </a:prstGeom>
-          <a:noFill/>
-          <a:ln/>
-        </p:spPr>
-        <p:txBody>
-          <a:bodyPr wrap="square" lIns="0" tIns="0" rIns="0" bIns="0" rtlCol="0" anchor="t"/>
-          <a:lstStyle/>
-          <a:p>
+              <a:t>Jede Aktion wird nachgelesen. </a:t>
+            </a:r>
             <a:pPr indent="0" marL="0">
-              <a:lnSpc>
-                <a:spcPct val="100000"/>
-              </a:lnSpc>
-              <a:buNone/>
-            </a:pPr>
-            <a:r>
-              <a:rPr lang="en-US" sz="1000" dirty="0">
+              <a:buNone/>
+            </a:pPr>
+            <a:r>
+              <a:rPr lang="en-US" sz="1050" dirty="0">
                 <a:solidFill>
                   <a:srgbClr val="44515E"/>
                 </a:solidFill>
@@ -2076,459 +2592,21 @@
                 <a:ea typeface="Calibri" pitchFamily="34" charset="-122"/>
                 <a:cs typeface="Calibri" pitchFamily="34" charset="-120"/>
               </a:rPr>
-              <a:t>Mitarbeiter steht mit einem Regelwerk in der Liste, hat aber keinen Zugang.</a:t>
-            </a:r>
-            <a:endParaRPr lang="en-US" sz="1000" dirty="0"/>
-          </a:p>
-        </p:txBody>
-      </p:sp>
-      <p:sp>
-        <p:nvSpPr>
-          <p:cNvPr id="37" name="Shape 35"/>
+              <a:t>Erst der frische Blick ins Portal gilt als Nachweis.</a:t>
+            </a:r>
+            <a:endParaRPr lang="en-US" sz="1050" dirty="0"/>
+          </a:p>
+        </p:txBody>
+      </p:sp>
+      <p:sp>
+        <p:nvSpPr>
+          <p:cNvPr id="52" name="Shape 50"/>
           <p:cNvSpPr/>
           <p:nvPr/>
         </p:nvSpPr>
         <p:spPr>
           <a:xfrm>
-            <a:off x="3392424" y="3547872"/>
-            <a:ext cx="2487168" cy="1152144"/>
-          </a:xfrm>
-          <a:prstGeom prst="roundRect">
-            <a:avLst>
-              <a:gd name="adj" fmla="val 4762"/>
-            </a:avLst>
-          </a:prstGeom>
-          <a:solidFill>
-            <a:srgbClr val="FFFFFF"/>
-          </a:solidFill>
-          <a:ln w="12700">
-            <a:solidFill>
-              <a:srgbClr val="D5E0E8"/>
-            </a:solidFill>
-            <a:prstDash val="solid"/>
-          </a:ln>
-        </p:spPr>
-      </p:sp>
-      <p:sp>
-        <p:nvSpPr>
-          <p:cNvPr id="38" name="Shape 36"/>
-          <p:cNvSpPr/>
-          <p:nvPr/>
-        </p:nvSpPr>
-        <p:spPr>
-          <a:xfrm>
-            <a:off x="3566160" y="3767328"/>
-            <a:ext cx="137160" cy="137160"/>
-          </a:xfrm>
-          <a:prstGeom prst="ellipse">
-            <a:avLst/>
-          </a:prstGeom>
-          <a:solidFill>
-            <a:srgbClr val="A63D32"/>
-          </a:solidFill>
-          <a:ln w="12700">
-            <a:solidFill>
-              <a:srgbClr val="A63D32"/>
-            </a:solidFill>
-            <a:prstDash val="solid"/>
-          </a:ln>
-        </p:spPr>
-      </p:sp>
-      <p:sp>
-        <p:nvSpPr>
-          <p:cNvPr id="39" name="Text 37"/>
-          <p:cNvSpPr txBox="1"/>
-          <p:nvPr/>
-        </p:nvSpPr>
-        <p:spPr>
-          <a:xfrm>
-            <a:off x="3794760" y="3694176"/>
-            <a:ext cx="1938528" cy="274320"/>
-          </a:xfrm>
-          <a:prstGeom prst="rect">
-            <a:avLst/>
-          </a:prstGeom>
-          <a:noFill/>
-          <a:ln/>
-        </p:spPr>
-        <p:txBody>
-          <a:bodyPr wrap="square" lIns="0" tIns="0" rIns="0" bIns="0" rtlCol="0" anchor="ctr"/>
-          <a:lstStyle/>
-          <a:p>
-            <a:pPr indent="0" marL="0">
-              <a:buNone/>
-            </a:pPr>
-            <a:r>
-              <a:rPr lang="en-US" sz="1200" b="1" spc="100" kern="0" dirty="0">
-                <a:solidFill>
-                  <a:srgbClr val="A63D32"/>
-                </a:solidFill>
-                <a:latin typeface="Calibri" pitchFamily="34" charset="0"/>
-                <a:ea typeface="Calibri" pitchFamily="34" charset="-122"/>
-                <a:cs typeface="Calibri" pitchFamily="34" charset="-120"/>
-              </a:rPr>
-              <a:t>ENTZIEHEN</a:t>
-            </a:r>
-            <a:endParaRPr lang="en-US" sz="1200" dirty="0"/>
-          </a:p>
-        </p:txBody>
-      </p:sp>
-      <p:sp>
-        <p:nvSpPr>
-          <p:cNvPr id="40" name="Text 38"/>
-          <p:cNvSpPr txBox="1"/>
-          <p:nvPr/>
-        </p:nvSpPr>
-        <p:spPr>
-          <a:xfrm>
-            <a:off x="3566160" y="4041648"/>
-            <a:ext cx="2139696" cy="621792"/>
-          </a:xfrm>
-          <a:prstGeom prst="rect">
-            <a:avLst/>
-          </a:prstGeom>
-          <a:noFill/>
-          <a:ln/>
-        </p:spPr>
-        <p:txBody>
-          <a:bodyPr wrap="square" lIns="0" tIns="0" rIns="0" bIns="0" rtlCol="0" anchor="t"/>
-          <a:lstStyle/>
-          <a:p>
-            <a:pPr indent="0" marL="0">
-              <a:lnSpc>
-                <a:spcPct val="100000"/>
-              </a:lnSpc>
-              <a:buNone/>
-            </a:pPr>
-            <a:r>
-              <a:rPr lang="en-US" sz="1000" dirty="0">
-                <a:solidFill>
-                  <a:srgbClr val="44515E"/>
-                </a:solidFill>
-                <a:latin typeface="Calibri" pitchFamily="34" charset="0"/>
-                <a:ea typeface="Calibri" pitchFamily="34" charset="-122"/>
-                <a:cs typeface="Calibri" pitchFamily="34" charset="-120"/>
-              </a:rPr>
-              <a:t>Ausgeschieden oder inaktiv, Austritt in den nächsten 30 Tagen, Bedarf entfallen.</a:t>
-            </a:r>
-            <a:endParaRPr lang="en-US" sz="1000" dirty="0"/>
-          </a:p>
-        </p:txBody>
-      </p:sp>
-      <p:sp>
-        <p:nvSpPr>
-          <p:cNvPr id="41" name="Shape 39"/>
-          <p:cNvSpPr/>
-          <p:nvPr/>
-        </p:nvSpPr>
-        <p:spPr>
-          <a:xfrm>
-            <a:off x="6281928" y="3547872"/>
-            <a:ext cx="2487168" cy="1152144"/>
-          </a:xfrm>
-          <a:prstGeom prst="roundRect">
-            <a:avLst>
-              <a:gd name="adj" fmla="val 4762"/>
-            </a:avLst>
-          </a:prstGeom>
-          <a:solidFill>
-            <a:srgbClr val="FFFFFF"/>
-          </a:solidFill>
-          <a:ln w="12700">
-            <a:solidFill>
-              <a:srgbClr val="D5E0E8"/>
-            </a:solidFill>
-            <a:prstDash val="solid"/>
-          </a:ln>
-        </p:spPr>
-      </p:sp>
-      <p:sp>
-        <p:nvSpPr>
-          <p:cNvPr id="42" name="Shape 40"/>
-          <p:cNvSpPr/>
-          <p:nvPr/>
-        </p:nvSpPr>
-        <p:spPr>
-          <a:xfrm>
-            <a:off x="6455664" y="3767328"/>
-            <a:ext cx="137160" cy="137160"/>
-          </a:xfrm>
-          <a:prstGeom prst="ellipse">
-            <a:avLst/>
-          </a:prstGeom>
-          <a:solidFill>
-            <a:srgbClr val="9C6F16"/>
-          </a:solidFill>
-          <a:ln w="12700">
-            <a:solidFill>
-              <a:srgbClr val="9C6F16"/>
-            </a:solidFill>
-            <a:prstDash val="solid"/>
-          </a:ln>
-        </p:spPr>
-      </p:sp>
-      <p:sp>
-        <p:nvSpPr>
-          <p:cNvPr id="43" name="Text 41"/>
-          <p:cNvSpPr txBox="1"/>
-          <p:nvPr/>
-        </p:nvSpPr>
-        <p:spPr>
-          <a:xfrm>
-            <a:off x="6684264" y="3694176"/>
-            <a:ext cx="1938528" cy="274320"/>
-          </a:xfrm>
-          <a:prstGeom prst="rect">
-            <a:avLst/>
-          </a:prstGeom>
-          <a:noFill/>
-          <a:ln/>
-        </p:spPr>
-        <p:txBody>
-          <a:bodyPr wrap="square" lIns="0" tIns="0" rIns="0" bIns="0" rtlCol="0" anchor="ctr"/>
-          <a:lstStyle/>
-          <a:p>
-            <a:pPr indent="0" marL="0">
-              <a:buNone/>
-            </a:pPr>
-            <a:r>
-              <a:rPr lang="en-US" sz="1200" b="1" spc="100" kern="0" dirty="0">
-                <a:solidFill>
-                  <a:srgbClr val="9C6F16"/>
-                </a:solidFill>
-                <a:latin typeface="Calibri" pitchFamily="34" charset="0"/>
-                <a:ea typeface="Calibri" pitchFamily="34" charset="-122"/>
-                <a:cs typeface="Calibri" pitchFamily="34" charset="-120"/>
-              </a:rPr>
-              <a:t>VERLÄNGERN</a:t>
-            </a:r>
-            <a:endParaRPr lang="en-US" sz="1200" dirty="0"/>
-          </a:p>
-        </p:txBody>
-      </p:sp>
-      <p:sp>
-        <p:nvSpPr>
-          <p:cNvPr id="44" name="Text 42"/>
-          <p:cNvSpPr txBox="1"/>
-          <p:nvPr/>
-        </p:nvSpPr>
-        <p:spPr>
-          <a:xfrm>
-            <a:off x="6455664" y="4041648"/>
-            <a:ext cx="2139696" cy="621792"/>
-          </a:xfrm>
-          <a:prstGeom prst="rect">
-            <a:avLst/>
-          </a:prstGeom>
-          <a:noFill/>
-          <a:ln/>
-        </p:spPr>
-        <p:txBody>
-          <a:bodyPr wrap="square" lIns="0" tIns="0" rIns="0" bIns="0" rtlCol="0" anchor="t"/>
-          <a:lstStyle/>
-          <a:p>
-            <a:pPr indent="0" marL="0">
-              <a:lnSpc>
-                <a:spcPct val="100000"/>
-              </a:lnSpc>
-              <a:buNone/>
-            </a:pPr>
-            <a:r>
-              <a:rPr lang="en-US" sz="1000" dirty="0">
-                <a:solidFill>
-                  <a:srgbClr val="44515E"/>
-                </a:solidFill>
-                <a:latin typeface="Calibri" pitchFamily="34" charset="0"/>
-                <a:ea typeface="Calibri" pitchFamily="34" charset="-122"/>
-                <a:cs typeface="Calibri" pitchFamily="34" charset="-120"/>
-              </a:rPr>
-              <a:t>Gültigkeit ist abgelaufen oder läuft im Vorlauffenster ab.</a:t>
-            </a:r>
-            <a:endParaRPr lang="en-US" sz="1000" dirty="0"/>
-          </a:p>
-        </p:txBody>
-      </p:sp>
-      <p:sp>
-        <p:nvSpPr>
-          <p:cNvPr id="45" name="Shape 43"/>
-          <p:cNvSpPr/>
-          <p:nvPr/>
-        </p:nvSpPr>
-        <p:spPr>
-          <a:xfrm>
-            <a:off x="9171432" y="3547872"/>
-            <a:ext cx="2487168" cy="1152144"/>
-          </a:xfrm>
-          <a:prstGeom prst="roundRect">
-            <a:avLst>
-              <a:gd name="adj" fmla="val 4762"/>
-            </a:avLst>
-          </a:prstGeom>
-          <a:solidFill>
-            <a:srgbClr val="FFFFFF"/>
-          </a:solidFill>
-          <a:ln w="12700">
-            <a:solidFill>
-              <a:srgbClr val="D5E0E8"/>
-            </a:solidFill>
-            <a:prstDash val="solid"/>
-          </a:ln>
-        </p:spPr>
-      </p:sp>
-      <p:sp>
-        <p:nvSpPr>
-          <p:cNvPr id="46" name="Shape 44"/>
-          <p:cNvSpPr/>
-          <p:nvPr/>
-        </p:nvSpPr>
-        <p:spPr>
-          <a:xfrm>
-            <a:off x="9345168" y="3767328"/>
-            <a:ext cx="137160" cy="137160"/>
-          </a:xfrm>
-          <a:prstGeom prst="ellipse">
-            <a:avLst/>
-          </a:prstGeom>
-          <a:solidFill>
-            <a:srgbClr val="6B7A8C"/>
-          </a:solidFill>
-          <a:ln w="12700">
-            <a:solidFill>
-              <a:srgbClr val="6B7A8C"/>
-            </a:solidFill>
-            <a:prstDash val="solid"/>
-          </a:ln>
-        </p:spPr>
-      </p:sp>
-      <p:sp>
-        <p:nvSpPr>
-          <p:cNvPr id="47" name="Text 45"/>
-          <p:cNvSpPr txBox="1"/>
-          <p:nvPr/>
-        </p:nvSpPr>
-        <p:spPr>
-          <a:xfrm>
-            <a:off x="9573768" y="3694176"/>
-            <a:ext cx="1938528" cy="274320"/>
-          </a:xfrm>
-          <a:prstGeom prst="rect">
-            <a:avLst/>
-          </a:prstGeom>
-          <a:noFill/>
-          <a:ln/>
-        </p:spPr>
-        <p:txBody>
-          <a:bodyPr wrap="square" lIns="0" tIns="0" rIns="0" bIns="0" rtlCol="0" anchor="ctr"/>
-          <a:lstStyle/>
-          <a:p>
-            <a:pPr indent="0" marL="0">
-              <a:buNone/>
-            </a:pPr>
-            <a:r>
-              <a:rPr lang="en-US" sz="1200" b="1" spc="100" kern="0" dirty="0">
-                <a:solidFill>
-                  <a:srgbClr val="6B7A8C"/>
-                </a:solidFill>
-                <a:latin typeface="Calibri" pitchFamily="34" charset="0"/>
-                <a:ea typeface="Calibri" pitchFamily="34" charset="-122"/>
-                <a:cs typeface="Calibri" pitchFamily="34" charset="-120"/>
-              </a:rPr>
-              <a:t>PRÜFEN</a:t>
-            </a:r>
-            <a:endParaRPr lang="en-US" sz="1200" dirty="0"/>
-          </a:p>
-        </p:txBody>
-      </p:sp>
-      <p:sp>
-        <p:nvSpPr>
-          <p:cNvPr id="48" name="Text 46"/>
-          <p:cNvSpPr txBox="1"/>
-          <p:nvPr/>
-        </p:nvSpPr>
-        <p:spPr>
-          <a:xfrm>
-            <a:off x="9345168" y="4041648"/>
-            <a:ext cx="2139696" cy="621792"/>
-          </a:xfrm>
-          <a:prstGeom prst="rect">
-            <a:avLst/>
-          </a:prstGeom>
-          <a:noFill/>
-          <a:ln/>
-        </p:spPr>
-        <p:txBody>
-          <a:bodyPr wrap="square" lIns="0" tIns="0" rIns="0" bIns="0" rtlCol="0" anchor="t"/>
-          <a:lstStyle/>
-          <a:p>
-            <a:pPr indent="0" marL="0">
-              <a:lnSpc>
-                <a:spcPct val="100000"/>
-              </a:lnSpc>
-              <a:buNone/>
-            </a:pPr>
-            <a:r>
-              <a:rPr lang="en-US" sz="1000" dirty="0">
-                <a:solidFill>
-                  <a:srgbClr val="44515E"/>
-                </a:solidFill>
-                <a:latin typeface="Calibri" pitchFamily="34" charset="0"/>
-                <a:ea typeface="Calibri" pitchFamily="34" charset="-122"/>
-                <a:cs typeface="Calibri" pitchFamily="34" charset="-120"/>
-              </a:rPr>
-              <a:t>Zugang ohne Stammdatensatz. Unklare Datenlage wird gemeldet, nie still entzogen.</a:t>
-            </a:r>
-            <a:endParaRPr lang="en-US" sz="1000" dirty="0"/>
-          </a:p>
-        </p:txBody>
-      </p:sp>
-      <p:sp>
-        <p:nvSpPr>
-          <p:cNvPr id="49" name="Text 47"/>
-          <p:cNvSpPr txBox="1"/>
-          <p:nvPr/>
-        </p:nvSpPr>
-        <p:spPr>
-          <a:xfrm>
-            <a:off x="502920" y="4901184"/>
-            <a:ext cx="4572000" cy="274320"/>
-          </a:xfrm>
-          <a:prstGeom prst="rect">
-            <a:avLst/>
-          </a:prstGeom>
-          <a:noFill/>
-          <a:ln/>
-        </p:spPr>
-        <p:txBody>
-          <a:bodyPr wrap="square" lIns="0" tIns="0" rIns="0" bIns="0" rtlCol="0" anchor="ctr"/>
-          <a:lstStyle/>
-          <a:p>
-            <a:pPr indent="0" marL="0">
-              <a:buNone/>
-            </a:pPr>
-            <a:r>
-              <a:rPr lang="en-US" sz="1600" b="1" dirty="0">
-                <a:solidFill>
-                  <a:srgbClr val="21295C"/>
-                </a:solidFill>
-                <a:latin typeface="Cambria" pitchFamily="34" charset="0"/>
-                <a:ea typeface="Cambria" pitchFamily="34" charset="-122"/>
-                <a:cs typeface="Cambria" pitchFamily="34" charset="-120"/>
-              </a:rPr>
-              <a:t>Konstruktionsprinzipien</a:t>
-            </a:r>
-            <a:endParaRPr lang="en-US" sz="1600" dirty="0"/>
-          </a:p>
-        </p:txBody>
-      </p:sp>
-      <p:sp>
-        <p:nvSpPr>
-          <p:cNvPr id="50" name="Shape 48"/>
-          <p:cNvSpPr/>
-          <p:nvPr/>
-        </p:nvSpPr>
-        <p:spPr>
-          <a:xfrm>
-            <a:off x="521208" y="5326380"/>
+            <a:off x="521208" y="5623560"/>
             <a:ext cx="100584" cy="100584"/>
           </a:xfrm>
           <a:prstGeom prst="ellipse">
@@ -2547,13 +2625,13 @@
       </p:sp>
       <p:sp>
         <p:nvSpPr>
-          <p:cNvPr id="51" name="Text 49"/>
+          <p:cNvPr id="53" name="Text 51"/>
           <p:cNvSpPr txBox="1"/>
           <p:nvPr/>
         </p:nvSpPr>
         <p:spPr>
           <a:xfrm>
-            <a:off x="740664" y="5248656"/>
+            <a:off x="740664" y="5545836"/>
             <a:ext cx="6720840" cy="256032"/>
           </a:xfrm>
           <a:prstGeom prst="rect">
@@ -2578,7 +2656,7 @@
                 <a:ea typeface="Calibri" pitchFamily="34" charset="-122"/>
                 <a:cs typeface="Calibri" pitchFamily="34" charset="-120"/>
               </a:rPr>
-              <a:t>Testlauf ist der Standard. </a:t>
+              <a:t>Nie still entziehen. </a:t>
             </a:r>
             <a:pPr indent="0" marL="0">
               <a:buNone/>
@@ -2592,7 +2670,7 @@
                 <a:ea typeface="Calibri" pitchFamily="34" charset="-122"/>
                 <a:cs typeface="Calibri" pitchFamily="34" charset="-120"/>
               </a:rPr>
-              <a:t>Der erste Lauf schreibt nichts und versendet nichts.</a:t>
+              <a:t>Unklare Datenlage wird zum Prüffall, nie zur Aktion.</a:t>
             </a:r>
             <a:endParaRPr lang="en-US" sz="1050" dirty="0"/>
           </a:p>
@@ -2600,13 +2678,13 @@
       </p:sp>
       <p:sp>
         <p:nvSpPr>
-          <p:cNvPr id="52" name="Shape 50"/>
+          <p:cNvPr id="54" name="Shape 52"/>
           <p:cNvSpPr/>
           <p:nvPr/>
         </p:nvSpPr>
         <p:spPr>
           <a:xfrm>
-            <a:off x="521208" y="5623560"/>
+            <a:off x="521208" y="5920740"/>
             <a:ext cx="100584" cy="100584"/>
           </a:xfrm>
           <a:prstGeom prst="ellipse">
@@ -2625,13 +2703,13 @@
       </p:sp>
       <p:sp>
         <p:nvSpPr>
-          <p:cNvPr id="53" name="Text 51"/>
+          <p:cNvPr id="55" name="Text 53"/>
           <p:cNvSpPr txBox="1"/>
           <p:nvPr/>
         </p:nvSpPr>
         <p:spPr>
           <a:xfrm>
-            <a:off x="740664" y="5545836"/>
+            <a:off x="740664" y="5843016"/>
             <a:ext cx="6720840" cy="256032"/>
           </a:xfrm>
           <a:prstGeom prst="rect">
@@ -2656,7 +2734,7 @@
                 <a:ea typeface="Calibri" pitchFamily="34" charset="-122"/>
                 <a:cs typeface="Calibri" pitchFamily="34" charset="-120"/>
               </a:rPr>
-              <a:t>Nie still entziehen. </a:t>
+              <a:t>Inbetriebnahme in drei Stufen. </a:t>
             </a:r>
             <a:pPr indent="0" marL="0">
               <a:buNone/>
@@ -2670,7 +2748,7 @@
                 <a:ea typeface="Calibri" pitchFamily="34" charset="-122"/>
                 <a:cs typeface="Calibri" pitchFamily="34" charset="-120"/>
               </a:rPr>
-              <a:t>Was nicht eindeutig zuordenbar ist, wird zum Prüffall.</a:t>
+              <a:t>Erst melden, dann lesen, dann schreiben.</a:t>
             </a:r>
             <a:endParaRPr lang="en-US" sz="1050" dirty="0"/>
           </a:p>
@@ -2678,13 +2756,13 @@
       </p:sp>
       <p:sp>
         <p:nvSpPr>
-          <p:cNvPr id="54" name="Shape 52"/>
+          <p:cNvPr id="56" name="Shape 54"/>
           <p:cNvSpPr/>
           <p:nvPr/>
         </p:nvSpPr>
         <p:spPr>
           <a:xfrm>
-            <a:off x="521208" y="5920740"/>
+            <a:off x="521208" y="6217920"/>
             <a:ext cx="100584" cy="100584"/>
           </a:xfrm>
           <a:prstGeom prst="ellipse">
@@ -2703,13 +2781,13 @@
       </p:sp>
       <p:sp>
         <p:nvSpPr>
-          <p:cNvPr id="55" name="Text 53"/>
+          <p:cNvPr id="57" name="Text 55"/>
           <p:cNvSpPr txBox="1"/>
           <p:nvPr/>
         </p:nvSpPr>
         <p:spPr>
           <a:xfrm>
-            <a:off x="740664" y="5843016"/>
+            <a:off x="740664" y="6140196"/>
             <a:ext cx="6720840" cy="256032"/>
           </a:xfrm>
           <a:prstGeom prst="rect">
@@ -2734,7 +2812,7 @@
                 <a:ea typeface="Calibri" pitchFamily="34" charset="-122"/>
                 <a:cs typeface="Calibri" pitchFamily="34" charset="-120"/>
               </a:rPr>
-              <a:t>Keine Zugangsdaten im Code. </a:t>
+              <a:t>Portal-Änderung trifft eine Datei. </a:t>
             </a:r>
             <a:pPr indent="0" marL="0">
               <a:buNone/>
@@ -2748,85 +2826,7 @@
                 <a:ea typeface="Calibri" pitchFamily="34" charset="-122"/>
                 <a:cs typeface="Calibri" pitchFamily="34" charset="-120"/>
               </a:rPr>
-              <a:t>Graph-App im Secret Scope, Leserecht auf genau eine Site.</a:t>
-            </a:r>
-            <a:endParaRPr lang="en-US" sz="1050" dirty="0"/>
-          </a:p>
-        </p:txBody>
-      </p:sp>
-      <p:sp>
-        <p:nvSpPr>
-          <p:cNvPr id="56" name="Shape 54"/>
-          <p:cNvSpPr/>
-          <p:nvPr/>
-        </p:nvSpPr>
-        <p:spPr>
-          <a:xfrm>
-            <a:off x="521208" y="6217920"/>
-            <a:ext cx="100584" cy="100584"/>
-          </a:xfrm>
-          <a:prstGeom prst="ellipse">
-            <a:avLst/>
-          </a:prstGeom>
-          <a:solidFill>
-            <a:srgbClr val="1C7293"/>
-          </a:solidFill>
-          <a:ln w="12700">
-            <a:solidFill>
-              <a:srgbClr val="1C7293"/>
-            </a:solidFill>
-            <a:prstDash val="solid"/>
-          </a:ln>
-        </p:spPr>
-      </p:sp>
-      <p:sp>
-        <p:nvSpPr>
-          <p:cNvPr id="57" name="Text 55"/>
-          <p:cNvSpPr txBox="1"/>
-          <p:nvPr/>
-        </p:nvSpPr>
-        <p:spPr>
-          <a:xfrm>
-            <a:off x="740664" y="6140196"/>
-            <a:ext cx="6720840" cy="256032"/>
-          </a:xfrm>
-          <a:prstGeom prst="rect">
-            <a:avLst/>
-          </a:prstGeom>
-          <a:noFill/>
-          <a:ln/>
-        </p:spPr>
-        <p:txBody>
-          <a:bodyPr wrap="square" lIns="0" tIns="0" rIns="0" bIns="0" rtlCol="0" anchor="ctr"/>
-          <a:lstStyle/>
-          <a:p>
-            <a:pPr indent="0" marL="0">
-              <a:buNone/>
-            </a:pPr>
-            <a:r>
-              <a:rPr lang="en-US" sz="1050" b="1" dirty="0">
-                <a:solidFill>
-                  <a:srgbClr val="21295C"/>
-                </a:solidFill>
-                <a:latin typeface="Calibri" pitchFamily="34" charset="0"/>
-                <a:ea typeface="Calibri" pitchFamily="34" charset="-122"/>
-                <a:cs typeface="Calibri" pitchFamily="34" charset="-120"/>
-              </a:rPr>
-              <a:t>Fachlogik ohne Cluster testbar. </a:t>
-            </a:r>
-            <a:pPr indent="0" marL="0">
-              <a:buNone/>
-            </a:pPr>
-            <a:r>
-              <a:rPr lang="en-US" sz="1050" dirty="0">
-                <a:solidFill>
-                  <a:srgbClr val="44515E"/>
-                </a:solidFill>
-                <a:latin typeface="Calibri" pitchFamily="34" charset="0"/>
-                <a:ea typeface="Calibri" pitchFamily="34" charset="-122"/>
-                <a:cs typeface="Calibri" pitchFamily="34" charset="-120"/>
-              </a:rPr>
-              <a:t>38 Tests laufen lokal, Regeln stehen an einer Stelle.</a:t>
+              <a:t>Alle Ortsangaben liegen in selektoren.json.</a:t>
             </a:r>
             <a:endParaRPr lang="en-US" sz="1050" dirty="0"/>
           </a:p>
@@ -2892,7 +2892,7 @@
                 <a:ea typeface="Cambria" pitchFamily="34" charset="-122"/>
                 <a:cs typeface="Cambria" pitchFamily="34" charset="-120"/>
               </a:rPr>
-              <a:t>Bewusst kein Auto-Provisioning</a:t>
+              <a:t>Was Handarbeit bleibt</a:t>
             </a:r>
             <a:endParaRPr lang="en-US" sz="1300" dirty="0"/>
           </a:p>
@@ -2934,7 +2934,7 @@
                 <a:ea typeface="Calibri" pitchFamily="34" charset="-122"/>
                 <a:cs typeface="Calibri" pitchFamily="34" charset="-120"/>
               </a:rPr>
-              <a:t>Der VDE bietet keine Schnittstelle. Der Job ersetzt die Recherche, nicht den Klick im Portal – und protokolliert jeden Lauf nachvollziehbar. Kommt später eine API, sind nur zwei Module betroffen.</a:t>
+              <a:t>Prüffälle mit unklarer Datenlage. Und nach einem Portal-Update die Selektoren nachziehen – ein Skript schlägt sie vor, realistisch ein- bis zweimal im Jahr.</a:t>
             </a:r>
             <a:endParaRPr lang="en-US" sz="1050" dirty="0"/>
           </a:p>
@@ -2973,7 +2973,7 @@
                 <a:ea typeface="Calibri" pitchFamily="34" charset="-122"/>
                 <a:cs typeface="Calibri" pitchFamily="34" charset="-120"/>
               </a:rPr>
-              <a:t>Repository: vde-zugangsverwaltung  ·  Notebook + Job-Definition (Asset Bundle)  ·  Unity Catalog: governance.vde_zugang</a:t>
+              <a:t>Repository: vde-zugangsverwaltung  ·  Playwright auf dem Job-Cluster  ·  58 Tests, davon 16 gegen ein Portal-Double  ·  Unity Catalog: governance.vde_zugang</a:t>
             </a:r>
             <a:endParaRPr lang="en-US" sz="900" dirty="0"/>
           </a:p>
